--- a/artifacts/output/SILENCE-Midnight-Korea-Hackathon-2026.pptx
+++ b/artifacts/output/SILENCE-Midnight-Korea-Hackathon-2026.pptx
@@ -2,18 +2,18 @@
 <file path=ppt/presentation.xml><?xml version="1.0" encoding="utf-8"?>
 <p:presentation xmlns:p="http://schemas.openxmlformats.org/presentationml/2006/main">
   <p:sldMasterIdLst>
-    <p:sldMasterId xmlns:r="http://schemas.openxmlformats.org/officeDocument/2006/relationships" id="2147483648" r:id="R4d86f85699614db6"/>
+    <p:sldMasterId xmlns:r="http://schemas.openxmlformats.org/officeDocument/2006/relationships" id="2147483648" r:id="R3a3a2b4a927b45fd"/>
   </p:sldMasterIdLst>
   <p:notesMasterIdLst>
-    <p:notesMasterId xmlns:r="http://schemas.openxmlformats.org/officeDocument/2006/relationships" r:id="R4b1d7eae64354bae"/>
+    <p:notesMasterId xmlns:r="http://schemas.openxmlformats.org/officeDocument/2006/relationships" r:id="R3454f8007b8c47aa"/>
   </p:notesMasterIdLst>
   <p:sldIdLst>
-    <p:sldId xmlns:r="http://schemas.openxmlformats.org/officeDocument/2006/relationships" id="256" r:id="R0b871cadacfc42e5"/>
-    <p:sldId xmlns:r="http://schemas.openxmlformats.org/officeDocument/2006/relationships" id="257" r:id="R7ec1225bef69402f"/>
-    <p:sldId xmlns:r="http://schemas.openxmlformats.org/officeDocument/2006/relationships" id="258" r:id="Rcc2ec15bf23244ad"/>
-    <p:sldId xmlns:r="http://schemas.openxmlformats.org/officeDocument/2006/relationships" id="259" r:id="R827c0a8567774e91"/>
-    <p:sldId xmlns:r="http://schemas.openxmlformats.org/officeDocument/2006/relationships" id="260" r:id="R9fad71dc13e34ea5"/>
-    <p:sldId xmlns:r="http://schemas.openxmlformats.org/officeDocument/2006/relationships" id="261" r:id="Rbbc5ca21ff864839"/>
+    <p:sldId xmlns:r="http://schemas.openxmlformats.org/officeDocument/2006/relationships" id="256" r:id="Rbc78de50bcd14c40"/>
+    <p:sldId xmlns:r="http://schemas.openxmlformats.org/officeDocument/2006/relationships" id="257" r:id="R509c6e96d7a34bce"/>
+    <p:sldId xmlns:r="http://schemas.openxmlformats.org/officeDocument/2006/relationships" id="258" r:id="Rdf270d5f4a714b42"/>
+    <p:sldId xmlns:r="http://schemas.openxmlformats.org/officeDocument/2006/relationships" id="259" r:id="Rbf77f3b8a5cc4e2b"/>
+    <p:sldId xmlns:r="http://schemas.openxmlformats.org/officeDocument/2006/relationships" id="260" r:id="R2fe8fbb4f8fe45be"/>
+    <p:sldId xmlns:r="http://schemas.openxmlformats.org/officeDocument/2006/relationships" id="261" r:id="R4e43916462cb41a6"/>
   </p:sldIdLst>
   <p:sldSz cx="12192000" cy="6858000"/>
   <p:notesSz cx="6858000" cy="9144000"/>
@@ -537,7 +537,7 @@
           </a:p>
           <a:p xmlns:a="http://schemas.openxmlformats.org/drawingml/2006/main">
             <a:r>
-              <a:t>주소와 체인 기록이 공개되면 거래 방향이나 규모를 추정할 단서가 될 수 있고, 그 정보가 청산 위험 구간을 읽는 데 쓰일 수 있습니다. 그래서 SILENCE는 “내 포지션과 손절 구간을 다른 거래자가 읽을 수 있다면?”이라는 질문에서 출발합니다. 이것은 구조적 문제 가설이며, 특정 공격 사례를 입증했다고 말하지 않습니다. 제품 목표는 포지션을 보유하는 동안 공개 청산맵 신호를 줄이는 것입니다. 종료 후에도 거래 방향을 숨긴다고 주장하지 않습니다.</a:t>
+              <a:t>주소와 체인 기록이 공개되면 거래 방향이나 규모를 추정할 단서가 될 수 있고, 그 정보가 청산 위험 구간을 읽는 데 쓰일 수 있습니다. 제품 목표는 보유 중 청산맵 노출을 줄이는 것입니다. 별도 G2 Local Devnet proof에서는 공개 진입·위험 가격으로 종료 뒤 Long 방향을 추정할 수 있었습니다. 이것은 main product contract와 별도인 실험이며 lifetime privacy 주장이 아닙니다.</a:t>
             </a:r>
           </a:p>
           <a:p xmlns:a="http://schemas.openxmlformats.org/drawingml/2006/main">
@@ -547,7 +547,7 @@
           </a:p>
           <a:p xmlns:a="http://schemas.openxmlformats.org/drawingml/2006/main">
             <a:r>
-              <a:t>Sources: https://github.com/diveyreadytodive-star/silence/blob/main/README.md ; https://github.com/diveyreadytodive-star/silence/blob/main/docs/security-boundary.md.</a:t>
+              <a:t>Sources: https://github.com/diveyreadytodive-star/silence/blob/main/README.md ; https://github.com/diveyreadytodive-star/silence/blob/main/spikes/integrated-risk-custody/docs/evidence/local-chain-risk-custody.json ; https://github.com/diveyreadytodive-star/silence/blob/main/docs/security-boundary.md</a:t>
             </a:r>
           </a:p>
         </p:txBody>
@@ -622,7 +622,7 @@
           </a:p>
           <a:p xmlns:a="http://schemas.openxmlformats.org/drawingml/2006/main">
             <a:r>
-              <a:t>SILENCE는 모두에게 모든 것을 숨긴다고 말하지 않습니다. 거래자는 전체 조건을 알고, 운영 위험 엔진도 포지션 값을 볼 수 있습니다. 공개 관찰자는 고정 1,000단위 담보와 coin index, commitment, 시각을 확인할 수 있습니다. 이 Phase 1 종료 회로는 수취인을 disclose 경계로 전달하므로 종료 시 공개로 다룹니다.</a:t>
+              <a:t>SILENCE는 모두에게 모든 것을 숨긴다고 말하지 않습니다. 거래자와 위험 엔진은 포지션 값을 알고, 공개 관찰자는 고정 1,000단위 담보와 coin index, commitment, 시각을 봅니다. 실제 main product Phase 1 open 기록에서는 선택된 side/notional/entry/guard 값이 확인되지 않았지만 이는 한 건의 제한된 raw-field 검사입니다. 별도 G2 Local Devnet risk-custody spike에서는 entry 100k, risk price 90k와 84k가 모두 Long의 손실 종료로 이어져 side를 공개 가격에서 추정할 수 있었습니다. 이 G2 경로는 main product contract에 통합되지 않았고 전체 이력 privacy도 아닙니다.</a:t>
             </a:r>
           </a:p>
           <a:p xmlns:a="http://schemas.openxmlformats.org/drawingml/2006/main">
@@ -632,17 +632,7 @@
           </a:p>
           <a:p xmlns:a="http://schemas.openxmlformats.org/drawingml/2006/main">
             <a:r>
-              <a:t>한 차례 실제 product-contract open 거래와 ledger readback에서 side, 정확한 notional, entry, guard의 선택된 값을 찾지 못했습니다. 이 관찰은 해당 기록의 제한된 필드 검사일 뿐입니다. 별도의 integrated risk-custody simulator 설계에서는 open 및 close 가격을 공개하므로 위험 종료 뒤 방향을 추정할 수 있습니다. 가격 하락은 손실 long, 가격 상승은 손실 short를 시사합니다. 이 분석은 simulator 설계 추론이며 실제 product-chain leak를 검증한 증거는 아닙니다. 따라서 제안의 범위는 보유 중 청산맵 노출 감소이며 전체 거래 이력 프라이버시가 아닙니다.</a:t>
-            </a:r>
-          </a:p>
-          <a:p xmlns:a="http://schemas.openxmlformats.org/drawingml/2006/main">
-            <a:r>
-              <a:t/>
-            </a:r>
-          </a:p>
-          <a:p xmlns:a="http://schemas.openxmlformats.org/drawingml/2006/main">
-            <a:r>
-              <a:t>Sources: https://github.com/diveyreadytodive-star/silence/blob/main/docs/security-boundary.md ; https://github.com/diveyreadytodive-star/silence/blob/main/docs/evidence/product-phase1-local-devnet.md ; https://github.com/diveyreadytodive-star/silence/blob/main/spikes/integrated-risk-custody/README.md.</a:t>
+              <a:t>Sources: https://github.com/diveyreadytodive-star/silence/blob/main/docs/security-boundary.md ; https://github.com/diveyreadytodive-star/silence/blob/main/docs/evidence/product-phase1-local-devnet.md ; https://github.com/diveyreadytodive-star/silence/blob/main/spikes/integrated-risk-custody/docs/evidence/local-chain-risk-custody.json</a:t>
             </a:r>
           </a:p>
         </p:txBody>
@@ -887,7 +877,7 @@
           </a:p>
           <a:p xmlns:a="http://schemas.openxmlformats.org/drawingml/2006/main">
             <a:r>
-              <a:t>별도의 two-stage feasibility spike에서 Local Devnet의 실제 receipt를 확인했습니다. open은 block 570, 별도 operator Zswap key의 operatorClose는 block 573, 원래 owner key의 ownerClaim은 block 577에서 확정됐습니다. operator close 뒤 상태는 ClosedUnclaimed였고 owner와 operator shielded 잔고는 모두 0이었습니다. owner가 나중에 fixed 1,000단위 test lot을 claim했고 owner 잔고는 1,000, operator 잔고는 0으로 확인했습니다. operator의 ownerClaim 시도는 NOT_POSITION_OWNER로 거절됐습니다.</a:t>
+              <a:t>두 개는 분리된 Local Devnet 실험입니다. G2 P90 entry/risk 100k/90k receipts는 open/close/claim block 989/995/999, P84 100k/84k는 1012/1019/1023입니다. 공개 가격쌍으로 종료 뒤 Long을 추정할 수 있었고, owner는 loss와 무관하게 fixed 1,000을 받았습니다.</a:t>
             </a:r>
           </a:p>
           <a:p xmlns:a="http://schemas.openxmlformats.org/drawingml/2006/main">
@@ -897,7 +887,7 @@
           </a:p>
           <a:p xmlns:a="http://schemas.openxmlformats.org/drawingml/2006/main">
             <a:r>
-              <a:t>중요한 수수료 한계가 있습니다. operator Zswap key와 owner Zswap key는 달랐지만, Local Devnet G1 runner는 operator shielded signer와 owner DustSecretKey를 같은 테스트 프로세스에서 함께 사용해 operator 거래의 DUST 수수료를 대납했습니다. 이 결과는 별도 shielded 권한과 owner 수령을 확인했지만, 운영 서비스가 owner wallet key material에 전혀 접근하지 않는 구조나 독립적으로 자금을 대는 operator를 증명하지 않습니다.</a:t>
+              <a:t>M2 static loss는 owner 800/LP 200 at 2855/2859, profit은 owner 1,200/reserve change 300 at 2909/2913이며 LP가 나중에 300을 spend했습니다. Payout은 caller-set 공개값이고 entrypoint가 regime을 드러냅니다. 이는 별도 test paths입니다. PnL/LP 경제 정산, owner self-close, main product integration은 없고 compound claim은 /check HTTP 400입니다. same-process owner/genesis DUST key가 수수료를 냈고 browser/Preprod 미검증입니다.</a:t>
             </a:r>
           </a:p>
           <a:p xmlns:a="http://schemas.openxmlformats.org/drawingml/2006/main">
@@ -907,27 +897,7 @@
           </a:p>
           <a:p xmlns:a="http://schemas.openxmlformats.org/drawingml/2006/main">
             <a:r>
-              <a:t>프라이버시도 전체 이력이 아니라 보유 중 신호 감소로 한정합니다. integrated risk-custody simulator 설계 분석에서는 공개 진입 및 종료 가격으로 risk close 뒤 방향을 추정할 수 있습니다. 가격이 내려가면 손실 long, 올라가면 손실 short를 시사합니다. 이 추론은 simulator 설계 분석이며 SILENCE product contract의 실제 체인에서 입증된 결과가 아닙니다.</a:t>
-            </a:r>
-          </a:p>
-          <a:p xmlns:a="http://schemas.openxmlformats.org/drawingml/2006/main">
-            <a:r>
-              <a:t/>
-            </a:r>
-          </a:p>
-          <a:p xmlns:a="http://schemas.openxmlformats.org/drawingml/2006/main">
-            <a:r>
-              <a:t>이 feasibility spike에는 oracle이나 risk predicate가 없으며 operator가 임의로 조기 종료할 수 있습니다. PnL/LP 정산, 주 SILENCE product-contract 통합, 브라우저 주문 흐름도 미검증입니다. 자산은 가치 없는 Local Devnet 테스트 lot입니다.</a:t>
-            </a:r>
-          </a:p>
-          <a:p xmlns:a="http://schemas.openxmlformats.org/drawingml/2006/main">
-            <a:r>
-              <a:t/>
-            </a:r>
-          </a:p>
-          <a:p xmlns:a="http://schemas.openxmlformats.org/drawingml/2006/main">
-            <a:r>
-              <a:t>Sources: https://github.com/diveyreadytodive-star/silence/blob/main/spikes/two-stage-claim/docs/evidence/local-chain.json ; https://github.com/diveyreadytodive-star/silence/blob/main/spikes/two-stage-claim/README.md ; https://github.com/diveyreadytodive-star/silence/blob/main/spikes/two-stage-claim/scripts/test-local-chain.ts ; https://github.com/diveyreadytodive-star/silence/blob/main/spikes/integrated-risk-custody/README.md ; https://github.com/diveyreadytodive-star/silence/blob/main/docs/verification-status.md</a:t>
+              <a:t>Sources: https://github.com/diveyreadytodive-star/silence/blob/main/spikes/integrated-risk-custody/docs/evidence/local-chain-risk-custody.json ; https://github.com/diveyreadytodive-star/silence/blob/main/spikes/lp-reserve/docs/evidence/diagnostic-loss-static-local-chain.json ; https://github.com/diveyreadytodive-star/silence/blob/main/spikes/lp-reserve/docs/evidence/diagnostic-profit-static-local-chain.json ; https://github.com/diveyreadytodive-star/silence/blob/main/spikes/lp-reserve/README.md ; https://github.com/diveyreadytodive-star/silence/blob/main/docs/verification-status.md</a:t>
             </a:r>
           </a:p>
         </p:txBody>
@@ -995,7 +965,7 @@
   </p:cSld>
   <p:clrMap bg1="lt1" tx1="dk1" bg2="lt2" tx2="dk2" accent1="accent1" accent2="accent2" accent3="accent3" accent4="accent4" accent5="accent5" accent6="accent6" hlink="hlink" folHlink="folHlink"/>
   <p:sldLayoutIdLst>
-    <p:sldLayoutId xmlns:r="http://schemas.openxmlformats.org/officeDocument/2006/relationships" id="2147483649" r:id="Rb1dd8317d25049c3"/>
+    <p:sldLayoutId xmlns:r="http://schemas.openxmlformats.org/officeDocument/2006/relationships" id="2147483649" r:id="Rea33117510c945a2"/>
   </p:sldLayoutIdLst>
   <p:txStyles>
     <p:titleStyle>
@@ -2497,7 +2467,7 @@
       </p:sp>
       <p:cxnSp>
         <p:nvCxnSpPr>
-          <p:cNvPr id="42" name=""/>
+          <p:cNvPr id="62" name=""/>
           <p:cNvCxnSpPr>
             <a:stCxn xmlns:a="http://schemas.openxmlformats.org/drawingml/2006/main" id="6" idx="3"/>
             <a:endCxn xmlns:a="http://schemas.openxmlformats.org/drawingml/2006/main" id="7" idx="1"/>
@@ -2523,7 +2493,7 @@
       </p:cxnSp>
       <p:cxnSp>
         <p:nvCxnSpPr>
-          <p:cNvPr id="43" name=""/>
+          <p:cNvPr id="63" name=""/>
           <p:cNvCxnSpPr>
             <a:stCxn xmlns:a="http://schemas.openxmlformats.org/drawingml/2006/main" id="7" idx="3"/>
             <a:endCxn xmlns:a="http://schemas.openxmlformats.org/drawingml/2006/main" id="8" idx="1"/>
@@ -2715,7 +2685,7 @@
                 <a:ea typeface="Arial"/>
                 <a:cs typeface="Arial"/>
               </a:rPr>
-              <a:t>통합 risk-custody simulator 설계상 종료 뒤 공개 가격으로 롱/숏 추정 가능. 제품 체인 proof가 아니며 전체 이력 비공개를 주장하지 않습니다.</a:t>
+              <a:t>별도 G2 Local Devnet proof에서 종료 뒤 Long 추론 가능. Main product 미통합, 전체 이력 비공개 아님.</a:t>
             </a:r>
           </a:p>
         </p:txBody>
@@ -3862,7 +3832,7 @@
                 <a:ea typeface="Arial"/>
                 <a:cs typeface="Arial"/>
               </a:rPr>
-              <a:t>통합 simulator 설계 분석에서는 종료 뒤 공개 가격으로 방향 추정 가능. 제품 체인 검증이나 전체 이력 프라이버시 증명은 아닙니다.</a:t>
+              <a:t>별도 G2 Local Devnet proof에서 종료 뒤 Long 추론 가능. Main product contract와 전체 이력 privacy는 증명하지 않았습니다.</a:t>
             </a:r>
           </a:p>
         </p:txBody>
@@ -5547,7 +5517,7 @@
           <p:nvPr/>
         </p:nvPicPr>
         <p:blipFill>
-          <a:blip xmlns:r="http://schemas.openxmlformats.org/officeDocument/2006/relationships" xmlns:a="http://schemas.openxmlformats.org/drawingml/2006/main" r:embed="R97976f2ce0e045de"/>
+          <a:blip xmlns:r="http://schemas.openxmlformats.org/officeDocument/2006/relationships" xmlns:a="http://schemas.openxmlformats.org/drawingml/2006/main" r:embed="Rab39f3aff0044a6f"/>
           <a:stretch xmlns:a="http://schemas.openxmlformats.org/drawingml/2006/main"/>
         </p:blipFill>
         <p:spPr>
@@ -6194,7 +6164,7 @@
                 <a:ea typeface="Arial"/>
                 <a:cs typeface="Arial"/>
               </a:rPr>
-              <a:t>별도 키로 종료와 수령을 Local Devnet에서 확인</a:t>
+              <a:t>Local Devnet risk close와 LP reserve 증거</a:t>
             </a:r>
           </a:p>
         </p:txBody>
@@ -6402,7 +6372,7 @@
                 <a:ea typeface="Arial"/>
                 <a:cs typeface="Arial"/>
               </a:rPr>
-              <a:t>실제 Local Devnet receipts: open 570, close 573, claim 577</a:t>
+              <a:t>G2 risk-custody P90/P84 · M2 static LP payout · separate spikes</a:t>
             </a:r>
           </a:p>
         </p:txBody>
@@ -6423,8 +6393,8 @@
         </p:nvSpPr>
         <p:spPr>
           <a:xfrm xmlns:a="http://schemas.openxmlformats.org/drawingml/2006/main">
-            <a:off x="762000" y="2190750"/>
-            <a:ext cx="4000500" cy="1162050"/>
+            <a:off x="762000" y="2028825"/>
+            <a:ext cx="4953000" cy="1714500"/>
           </a:xfrm>
           <a:prstGeom xmlns:a="http://schemas.openxmlformats.org/drawingml/2006/main" prst="rect">
             <a:avLst/>
@@ -6453,15 +6423,15 @@
               </a:defRPr>
             </a:pPr>
             <a:r>
-              <a:rPr sz="1875" b="1">
-                <a:solidFill>
-                  <a:srgbClr val="F3F6F2"/>
-                </a:solidFill>
-                <a:latin typeface="Arial"/>
-                <a:ea typeface="Arial"/>
-                <a:cs typeface="Arial"/>
-              </a:rPr>
-              <a:t>1  operator close · block 573</a:t>
+              <a:rPr sz="1575" b="0">
+                <a:solidFill>
+                  <a:srgbClr val="F3F6F2"/>
+                </a:solidFill>
+                <a:latin typeface="Arial"/>
+                <a:ea typeface="Arial"/>
+                <a:cs typeface="Arial"/>
+              </a:rPr>
+              <a:t>G2 · P90 protective</a:t>
             </a:r>
           </a:p>
           <a:p xmlns:a="http://schemas.openxmlformats.org/drawingml/2006/main">
@@ -6477,15 +6447,15 @@
               </a:defRPr>
             </a:pPr>
             <a:r>
-              <a:rPr sz="1875" b="1">
-                <a:solidFill>
-                  <a:srgbClr val="F3F6F2"/>
-                </a:solidFill>
-                <a:latin typeface="Arial"/>
-                <a:ea typeface="Arial"/>
-                <a:cs typeface="Arial"/>
-              </a:rPr>
-              <a:t>별도 Zswap key로 ClosedUnclaimed</a:t>
+              <a:rPr sz="1575" b="0">
+                <a:solidFill>
+                  <a:srgbClr val="F3F6F2"/>
+                </a:solidFill>
+                <a:latin typeface="Arial"/>
+                <a:ea typeface="Arial"/>
+                <a:cs typeface="Arial"/>
+              </a:rPr>
+              <a:t>entry 100k / risk 90k</a:t>
             </a:r>
           </a:p>
           <a:p xmlns:a="http://schemas.openxmlformats.org/drawingml/2006/main">
@@ -6501,15 +6471,111 @@
               </a:defRPr>
             </a:pPr>
             <a:r>
-              <a:rPr sz="1875" b="1">
-                <a:solidFill>
-                  <a:srgbClr val="F3F6F2"/>
-                </a:solidFill>
-                <a:latin typeface="Arial"/>
-                <a:ea typeface="Arial"/>
-                <a:cs typeface="Arial"/>
-              </a:rPr>
-              <a:t>owner 잔고 0 · operator 잔고 0</a:t>
+              <a:rPr sz="1575" b="0">
+                <a:solidFill>
+                  <a:srgbClr val="F3F6F2"/>
+                </a:solidFill>
+                <a:latin typeface="Arial"/>
+                <a:ea typeface="Arial"/>
+                <a:cs typeface="Arial"/>
+              </a:rPr>
+              <a:t>open 989 · close 995 · claim 999</a:t>
+            </a:r>
+          </a:p>
+          <a:p xmlns:a="http://schemas.openxmlformats.org/drawingml/2006/main">
+            <a:pPr algn="l">
+              <a:buNone/>
+              <a:defRPr sz="1875" b="1">
+                <a:solidFill>
+                  <a:srgbClr val="F3F6F2"/>
+                </a:solidFill>
+                <a:latin typeface="Arial"/>
+                <a:ea typeface="Arial"/>
+                <a:cs typeface="Arial"/>
+              </a:defRPr>
+            </a:pPr>
+            <a:r>
+              <a:rPr sz="1575" b="0">
+                <a:solidFill>
+                  <a:srgbClr val="F3F6F2"/>
+                </a:solidFill>
+                <a:latin typeface="Arial"/>
+                <a:ea typeface="Arial"/>
+                <a:cs typeface="Arial"/>
+              </a:rPr>
+              <a:t>G2 · P84 liquidation</a:t>
+            </a:r>
+          </a:p>
+          <a:p xmlns:a="http://schemas.openxmlformats.org/drawingml/2006/main">
+            <a:pPr algn="l">
+              <a:buNone/>
+              <a:defRPr sz="1875" b="1">
+                <a:solidFill>
+                  <a:srgbClr val="F3F6F2"/>
+                </a:solidFill>
+                <a:latin typeface="Arial"/>
+                <a:ea typeface="Arial"/>
+                <a:cs typeface="Arial"/>
+              </a:defRPr>
+            </a:pPr>
+            <a:r>
+              <a:rPr sz="1575" b="0">
+                <a:solidFill>
+                  <a:srgbClr val="F3F6F2"/>
+                </a:solidFill>
+                <a:latin typeface="Arial"/>
+                <a:ea typeface="Arial"/>
+                <a:cs typeface="Arial"/>
+              </a:rPr>
+              <a:t>entry 100k / risk 84k</a:t>
+            </a:r>
+          </a:p>
+          <a:p xmlns:a="http://schemas.openxmlformats.org/drawingml/2006/main">
+            <a:pPr algn="l">
+              <a:buNone/>
+              <a:defRPr sz="1875" b="1">
+                <a:solidFill>
+                  <a:srgbClr val="F3F6F2"/>
+                </a:solidFill>
+                <a:latin typeface="Arial"/>
+                <a:ea typeface="Arial"/>
+                <a:cs typeface="Arial"/>
+              </a:defRPr>
+            </a:pPr>
+            <a:r>
+              <a:rPr sz="1575" b="0">
+                <a:solidFill>
+                  <a:srgbClr val="F3F6F2"/>
+                </a:solidFill>
+                <a:latin typeface="Arial"/>
+                <a:ea typeface="Arial"/>
+                <a:cs typeface="Arial"/>
+              </a:rPr>
+              <a:t>open 1012 · close 1019 · claim 1023</a:t>
+            </a:r>
+          </a:p>
+          <a:p xmlns:a="http://schemas.openxmlformats.org/drawingml/2006/main">
+            <a:pPr algn="l">
+              <a:buNone/>
+              <a:defRPr sz="1875" b="1">
+                <a:solidFill>
+                  <a:srgbClr val="F3F6F2"/>
+                </a:solidFill>
+                <a:latin typeface="Arial"/>
+                <a:ea typeface="Arial"/>
+                <a:cs typeface="Arial"/>
+              </a:defRPr>
+            </a:pPr>
+            <a:r>
+              <a:rPr sz="1575" b="0">
+                <a:solidFill>
+                  <a:srgbClr val="F3F6F2"/>
+                </a:solidFill>
+                <a:latin typeface="Arial"/>
+                <a:ea typeface="Arial"/>
+                <a:cs typeface="Arial"/>
+              </a:rPr>
+              <a:t>owner 1,000 each · operator 0</a:t>
             </a:r>
           </a:p>
         </p:txBody>
@@ -6530,8 +6596,8 @@
         </p:nvSpPr>
         <p:spPr>
           <a:xfrm xmlns:a="http://schemas.openxmlformats.org/drawingml/2006/main">
-            <a:off x="7239000" y="2190750"/>
-            <a:ext cx="4000500" cy="1162050"/>
+            <a:off x="6477000" y="2028825"/>
+            <a:ext cx="4953000" cy="1714500"/>
           </a:xfrm>
           <a:prstGeom xmlns:a="http://schemas.openxmlformats.org/drawingml/2006/main" prst="rect">
             <a:avLst/>
@@ -6560,15 +6626,15 @@
               </a:defRPr>
             </a:pPr>
             <a:r>
-              <a:rPr sz="1875" b="1">
-                <a:solidFill>
-                  <a:srgbClr val="F3F6F2"/>
-                </a:solidFill>
-                <a:latin typeface="Arial"/>
-                <a:ea typeface="Arial"/>
-                <a:cs typeface="Arial"/>
-              </a:rPr>
-              <a:t>2  owner claim · block 577</a:t>
+              <a:rPr sz="1575" b="0">
+                <a:solidFill>
+                  <a:srgbClr val="F3F6F2"/>
+                </a:solidFill>
+                <a:latin typeface="Arial"/>
+                <a:ea typeface="Arial"/>
+                <a:cs typeface="Arial"/>
+              </a:rPr>
+              <a:t>M2 · static loss diagnostic</a:t>
             </a:r>
           </a:p>
           <a:p xmlns:a="http://schemas.openxmlformats.org/drawingml/2006/main">
@@ -6584,15 +6650,15 @@
               </a:defRPr>
             </a:pPr>
             <a:r>
-              <a:rPr sz="1875" b="1">
-                <a:solidFill>
-                  <a:srgbClr val="F3F6F2"/>
-                </a:solidFill>
-                <a:latin typeface="Arial"/>
-                <a:ea typeface="Arial"/>
-                <a:cs typeface="Arial"/>
-              </a:rPr>
-              <a:t>원래 owner key로 test lot 수령</a:t>
+              <a:rPr sz="1575" b="0">
+                <a:solidFill>
+                  <a:srgbClr val="F3F6F2"/>
+                </a:solidFill>
+                <a:latin typeface="Arial"/>
+                <a:ea typeface="Arial"/>
+                <a:cs typeface="Arial"/>
+              </a:rPr>
+              <a:t>owner 800 · LP claims 200</a:t>
             </a:r>
           </a:p>
           <a:p xmlns:a="http://schemas.openxmlformats.org/drawingml/2006/main">
@@ -6608,45 +6674,91 @@
               </a:defRPr>
             </a:pPr>
             <a:r>
-              <a:rPr sz="1875" b="1">
-                <a:solidFill>
-                  <a:srgbClr val="F3F6F2"/>
-                </a:solidFill>
-                <a:latin typeface="Arial"/>
-                <a:ea typeface="Arial"/>
-                <a:cs typeface="Arial"/>
-              </a:rPr>
-              <a:t>owner 0에서 1,000 · operator 0</a:t>
-            </a:r>
-          </a:p>
-        </p:txBody>
-      </p:sp>
-      <p:cxnSp>
-        <p:nvCxnSpPr>
-          <p:cNvPr id="38" name=""/>
-          <p:cNvCxnSpPr>
-            <a:stCxn xmlns:a="http://schemas.openxmlformats.org/drawingml/2006/main" id="6" idx="3"/>
-            <a:endCxn xmlns:a="http://schemas.openxmlformats.org/drawingml/2006/main" id="7" idx="1"/>
-          </p:cNvCxnSpPr>
-          <p:nvPr/>
-        </p:nvCxnSpPr>
-        <p:spPr>
-          <a:xfrm xmlns:a="http://schemas.openxmlformats.org/drawingml/2006/main">
-            <a:off x="4762500" y="2771775"/>
-            <a:ext cx="2476500" cy="0"/>
-          </a:xfrm>
-          <a:prstGeom xmlns:a="http://schemas.openxmlformats.org/drawingml/2006/main" prst="straightConnector1">
-            <a:avLst/>
-          </a:prstGeom>
-          <a:ln xmlns:a="http://schemas.openxmlformats.org/drawingml/2006/main" w="19050">
-            <a:solidFill>
-              <a:srgbClr val="C7F36B"/>
-            </a:solidFill>
-            <a:prstDash val="dash"/>
-            <a:tailEnd type="triangle" w="sm" len="sm"/>
-          </a:ln>
-        </p:spPr>
-      </p:cxnSp>
+              <a:rPr sz="1575" b="0">
+                <a:solidFill>
+                  <a:srgbClr val="F3F6F2"/>
+                </a:solidFill>
+                <a:latin typeface="Arial"/>
+                <a:ea typeface="Arial"/>
+                <a:cs typeface="Arial"/>
+              </a:rPr>
+              <a:t>blocks 2855 / 2859</a:t>
+            </a:r>
+          </a:p>
+          <a:p xmlns:a="http://schemas.openxmlformats.org/drawingml/2006/main">
+            <a:pPr algn="l">
+              <a:buNone/>
+              <a:defRPr sz="1875" b="1">
+                <a:solidFill>
+                  <a:srgbClr val="F3F6F2"/>
+                </a:solidFill>
+                <a:latin typeface="Arial"/>
+                <a:ea typeface="Arial"/>
+                <a:cs typeface="Arial"/>
+              </a:defRPr>
+            </a:pPr>
+            <a:r>
+              <a:rPr sz="1575" b="0">
+                <a:solidFill>
+                  <a:srgbClr val="F3F6F2"/>
+                </a:solidFill>
+                <a:latin typeface="Arial"/>
+                <a:ea typeface="Arial"/>
+                <a:cs typeface="Arial"/>
+              </a:rPr>
+              <a:t>M2 · static profit diagnostic</a:t>
+            </a:r>
+          </a:p>
+          <a:p xmlns:a="http://schemas.openxmlformats.org/drawingml/2006/main">
+            <a:pPr algn="l">
+              <a:buNone/>
+              <a:defRPr sz="1875" b="1">
+                <a:solidFill>
+                  <a:srgbClr val="F3F6F2"/>
+                </a:solidFill>
+                <a:latin typeface="Arial"/>
+                <a:ea typeface="Arial"/>
+                <a:cs typeface="Arial"/>
+              </a:defRPr>
+            </a:pPr>
+            <a:r>
+              <a:rPr sz="1575" b="0">
+                <a:solidFill>
+                  <a:srgbClr val="F3F6F2"/>
+                </a:solidFill>
+                <a:latin typeface="Arial"/>
+                <a:ea typeface="Arial"/>
+                <a:cs typeface="Arial"/>
+              </a:rPr>
+              <a:t>owner 1,200 · reserve change 300</a:t>
+            </a:r>
+          </a:p>
+          <a:p xmlns:a="http://schemas.openxmlformats.org/drawingml/2006/main">
+            <a:pPr algn="l">
+              <a:buNone/>
+              <a:defRPr sz="1875" b="1">
+                <a:solidFill>
+                  <a:srgbClr val="F3F6F2"/>
+                </a:solidFill>
+                <a:latin typeface="Arial"/>
+                <a:ea typeface="Arial"/>
+                <a:cs typeface="Arial"/>
+              </a:defRPr>
+            </a:pPr>
+            <a:r>
+              <a:rPr sz="1575" b="0">
+                <a:solidFill>
+                  <a:srgbClr val="F3F6F2"/>
+                </a:solidFill>
+                <a:latin typeface="Arial"/>
+                <a:ea typeface="Arial"/>
+                <a:cs typeface="Arial"/>
+              </a:rPr>
+              <a:t>blocks 2909 / 2913 · LP later spends 300</a:t>
+            </a:r>
+          </a:p>
+        </p:txBody>
+      </p:sp>
       <p:sp>
         <p:nvSpPr>
           <p:cNvPr id="9" name="step-note-1">
@@ -6663,8 +6775,8 @@
         </p:nvSpPr>
         <p:spPr>
           <a:xfrm xmlns:a="http://schemas.openxmlformats.org/drawingml/2006/main">
-            <a:off x="762000" y="3600450"/>
-            <a:ext cx="4000500" cy="285750"/>
+            <a:off x="762000" y="3867150"/>
+            <a:ext cx="4953000" cy="285750"/>
           </a:xfrm>
           <a:prstGeom xmlns:a="http://schemas.openxmlformats.org/drawingml/2006/main" prst="rect">
             <a:avLst/>
@@ -6693,7 +6805,7 @@
               </a:defRPr>
             </a:pPr>
             <a:r>
-              <a:rPr sz="1425" b="0">
+              <a:rPr sz="1275" b="0">
                 <a:solidFill>
                   <a:srgbClr val="F5B45C"/>
                 </a:solidFill>
@@ -6701,7 +6813,7 @@
                 <a:ea typeface="Arial"/>
                 <a:cs typeface="Arial"/>
               </a:rPr>
-              <a:t>위험 조건 없음 · operator 조기 종료 가능</a:t>
+              <a:t>Public entry/risk quotes imply Long after close</a:t>
             </a:r>
           </a:p>
         </p:txBody>
@@ -6722,8 +6834,8 @@
         </p:nvSpPr>
         <p:spPr>
           <a:xfrm xmlns:a="http://schemas.openxmlformats.org/drawingml/2006/main">
-            <a:off x="7239000" y="3600450"/>
-            <a:ext cx="4000500" cy="400050"/>
+            <a:off x="6477000" y="3867150"/>
+            <a:ext cx="4953000" cy="285750"/>
           </a:xfrm>
           <a:prstGeom xmlns:a="http://schemas.openxmlformats.org/drawingml/2006/main" prst="rect">
             <a:avLst/>
@@ -6760,7 +6872,7 @@
                 <a:ea typeface="Arial"/>
                 <a:cs typeface="Arial"/>
               </a:rPr>
-              <a:t>같은 runner가 owner DustSecretKey로 fee 대납</a:t>
+              <a:t>Caller-set public payout · circuit regime visible</a:t>
             </a:r>
           </a:p>
         </p:txBody>
@@ -6850,7 +6962,7 @@
                 <a:ea typeface="Arial"/>
                 <a:cs typeface="Arial"/>
               </a:rPr>
-              <a:t>두 키로 실행한 Local Devnet evidence</a:t>
+              <a:t>실증 범위</a:t>
             </a:r>
           </a:p>
         </p:txBody>
@@ -6909,7 +7021,7 @@
                 <a:ea typeface="Arial"/>
                 <a:cs typeface="Arial"/>
               </a:rPr>
-              <a:t>operator 종료 후 원래 owner가 자기 키로 담보 claim</a:t>
+              <a:t>Risk-close and reserve paths finalized on Local Devnet</a:t>
             </a:r>
           </a:p>
         </p:txBody>
@@ -6930,8 +7042,8 @@
         </p:nvSpPr>
         <p:spPr>
           <a:xfrm xmlns:a="http://schemas.openxmlformats.org/drawingml/2006/main">
-            <a:off x="723900" y="5467350"/>
-            <a:ext cx="10744200" cy="361950"/>
+            <a:off x="723900" y="5381625"/>
+            <a:ext cx="10744200" cy="781050"/>
           </a:xfrm>
           <a:prstGeom xmlns:a="http://schemas.openxmlformats.org/drawingml/2006/main" prst="rect">
             <a:avLst/>
@@ -6960,7 +7072,7 @@
               </a:defRPr>
             </a:pPr>
             <a:r>
-              <a:rPr sz="1575" b="0">
+              <a:rPr sz="1350" b="0">
                 <a:solidFill>
                   <a:srgbClr val="F5B45C"/>
                 </a:solidFill>
@@ -6968,7 +7080,55 @@
                 <a:ea typeface="Arial"/>
                 <a:cs typeface="Arial"/>
               </a:rPr>
-              <a:t>전체 이력 프라이버시를 주장하지 않음 · 오라클/위험 판정/PnL·LP/제품/브라우저 미검증</a:t>
+              <a:t>G2 refunds the full 1,000 lot regardless of loss. No oracle-bound PnL, economic LP settlement, or owner self-close.</a:t>
+            </a:r>
+          </a:p>
+          <a:p xmlns:a="http://schemas.openxmlformats.org/drawingml/2006/main">
+            <a:pPr algn="l">
+              <a:buNone/>
+              <a:defRPr sz="1575" b="0">
+                <a:solidFill>
+                  <a:srgbClr val="F5B45C"/>
+                </a:solidFill>
+                <a:latin typeface="Arial"/>
+                <a:ea typeface="Arial"/>
+                <a:cs typeface="Arial"/>
+              </a:defRPr>
+            </a:pPr>
+            <a:r>
+              <a:rPr sz="1350" b="0">
+                <a:solidFill>
+                  <a:srgbClr val="F5B45C"/>
+                </a:solidFill>
+                <a:latin typeface="Arial"/>
+                <a:ea typeface="Arial"/>
+                <a:cs typeface="Arial"/>
+              </a:rPr>
+              <a:t>M2 proves static moves only: caller-set public payouts reveal regime. Separate spikes, not product integration.</a:t>
+            </a:r>
+          </a:p>
+          <a:p xmlns:a="http://schemas.openxmlformats.org/drawingml/2006/main">
+            <a:pPr algn="l">
+              <a:buNone/>
+              <a:defRPr sz="1575" b="0">
+                <a:solidFill>
+                  <a:srgbClr val="F5B45C"/>
+                </a:solidFill>
+                <a:latin typeface="Arial"/>
+                <a:ea typeface="Arial"/>
+                <a:cs typeface="Arial"/>
+              </a:defRPr>
+            </a:pPr>
+            <a:r>
+              <a:rPr sz="1350" b="0">
+                <a:solidFill>
+                  <a:srgbClr val="F5B45C"/>
+                </a:solidFill>
+                <a:latin typeface="Arial"/>
+                <a:ea typeface="Arial"/>
+                <a:cs typeface="Arial"/>
+              </a:rPr>
+              <a:t>Same-process owner/genesis DUST sponsor. Browser/Preprod unverified. Main compound claim still /check HTTP 400.</a:t>
             </a:r>
           </a:p>
         </p:txBody>
